--- a/assets/pptx/catalog-456.pptx
+++ b/assets/pptx/catalog-456.pptx
@@ -3248,7 +3248,7 @@
                 <a:ea typeface="Ebrima"/>
                 <a:cs typeface="Ebrima"/>
               </a:rPr>
-              <a:t>ብዙዎች ብዙ ብለውሃል (4x)</a:t>
+              <a:t>ብዙዎች ብዙ ብለውሃል 4x</a:t>
             </a:r>
           </a:p>
           <a:p>
@@ -3369,7 +3369,7 @@
                 <a:ea typeface="Ebrima"/>
                 <a:cs typeface="Ebrima"/>
               </a:rPr>
-              <a:t>ያልተባለልህ (4x)</a:t>
+              <a:t>ያልተባለልህ 4x</a:t>
             </a:r>
           </a:p>
           <a:p>
@@ -3454,7 +3454,7 @@
                 <a:ea typeface="Ebrima"/>
                 <a:cs typeface="Ebrima"/>
               </a:rPr>
-              <a:t>ያልሰማነው ገና ያላየነው ገና ያላወቅነው ገና (3x)</a:t>
+              <a:t>ያልሰማነው ገና ያላየነው ገና ያላወቅነው ገና 3x</a:t>
             </a:r>
           </a:p>
           <a:p>
@@ -3593,7 +3593,7 @@
                 <a:ea typeface="Ebrima"/>
                 <a:cs typeface="Ebrima"/>
               </a:rPr>
-              <a:t>ያልተባለልህ (4x)</a:t>
+              <a:t>ያልተባለልህ 4x</a:t>
             </a:r>
           </a:p>
           <a:p>
@@ -3884,7 +3884,7 @@
                 <a:ea typeface="Ebrima"/>
                 <a:cs typeface="Ebrima"/>
               </a:rPr>
-              <a:t>እግዚኣብሔር ትልቅ ነው አና ያላወቅነው (2x)</a:t>
+              <a:t>እግዚኣብሔር ትልቅ ነው አና ያላወቅነው 2x</a:t>
             </a:r>
           </a:p>
           <a:p>
@@ -3920,7 +3920,7 @@
                 <a:ea typeface="Ebrima"/>
                 <a:cs typeface="Ebrima"/>
               </a:rPr>
-              <a:t>ካደነቅንህም በላይ (3x)</a:t>
+              <a:t>ካደነቅንህም በላይ 3x</a:t>
             </a:r>
           </a:p>
         </p:txBody>
@@ -4023,7 +4023,7 @@
                 <a:ea typeface="Ebrima"/>
                 <a:cs typeface="Ebrima"/>
               </a:rPr>
-              <a:t>እኛ ያላወቅነው (4x)</a:t>
+              <a:t>እኛ ያላወቅነው 4x</a:t>
             </a:r>
           </a:p>
         </p:txBody>
